--- a/docs/IAM_Assistant_Intro.pptx
+++ b/docs/IAM_Assistant_Intro.pptx
@@ -309,7 +309,7 @@
           <a:p>
             <a:fld id="{5BCAD085-E8A6-8845-BD4E-CB4CCA059FC4}" type="datetimeFigureOut">
               <a:rPr lang="en-US" smtClean="0"/>
-              <a:t>6/12/26</a:t>
+              <a:t>6/24/26</a:t>
             </a:fld>
             <a:endParaRPr lang="en-US"/>
           </a:p>
@@ -477,7 +477,7 @@
           <a:p>
             <a:fld id="{5BCAD085-E8A6-8845-BD4E-CB4CCA059FC4}" type="datetimeFigureOut">
               <a:rPr lang="en-US" smtClean="0"/>
-              <a:t>6/12/26</a:t>
+              <a:t>6/24/26</a:t>
             </a:fld>
             <a:endParaRPr lang="en-US"/>
           </a:p>
@@ -655,7 +655,7 @@
           <a:p>
             <a:fld id="{5BCAD085-E8A6-8845-BD4E-CB4CCA059FC4}" type="datetimeFigureOut">
               <a:rPr lang="en-US" smtClean="0"/>
-              <a:t>6/12/26</a:t>
+              <a:t>6/24/26</a:t>
             </a:fld>
             <a:endParaRPr lang="en-US"/>
           </a:p>
@@ -823,7 +823,7 @@
           <a:p>
             <a:fld id="{5BCAD085-E8A6-8845-BD4E-CB4CCA059FC4}" type="datetimeFigureOut">
               <a:rPr lang="en-US" smtClean="0"/>
-              <a:t>6/12/26</a:t>
+              <a:t>6/24/26</a:t>
             </a:fld>
             <a:endParaRPr lang="en-US"/>
           </a:p>
@@ -1068,7 +1068,7 @@
           <a:p>
             <a:fld id="{5BCAD085-E8A6-8845-BD4E-CB4CCA059FC4}" type="datetimeFigureOut">
               <a:rPr lang="en-US" smtClean="0"/>
-              <a:t>6/12/26</a:t>
+              <a:t>6/24/26</a:t>
             </a:fld>
             <a:endParaRPr lang="en-US"/>
           </a:p>
@@ -1353,7 +1353,7 @@
           <a:p>
             <a:fld id="{5BCAD085-E8A6-8845-BD4E-CB4CCA059FC4}" type="datetimeFigureOut">
               <a:rPr lang="en-US" smtClean="0"/>
-              <a:t>6/12/26</a:t>
+              <a:t>6/24/26</a:t>
             </a:fld>
             <a:endParaRPr lang="en-US"/>
           </a:p>
@@ -1772,7 +1772,7 @@
           <a:p>
             <a:fld id="{5BCAD085-E8A6-8845-BD4E-CB4CCA059FC4}" type="datetimeFigureOut">
               <a:rPr lang="en-US" smtClean="0"/>
-              <a:t>6/12/26</a:t>
+              <a:t>6/24/26</a:t>
             </a:fld>
             <a:endParaRPr lang="en-US"/>
           </a:p>
@@ -1889,7 +1889,7 @@
           <a:p>
             <a:fld id="{5BCAD085-E8A6-8845-BD4E-CB4CCA059FC4}" type="datetimeFigureOut">
               <a:rPr lang="en-US" smtClean="0"/>
-              <a:t>6/12/26</a:t>
+              <a:t>6/24/26</a:t>
             </a:fld>
             <a:endParaRPr lang="en-US"/>
           </a:p>
@@ -1984,7 +1984,7 @@
           <a:p>
             <a:fld id="{5BCAD085-E8A6-8845-BD4E-CB4CCA059FC4}" type="datetimeFigureOut">
               <a:rPr lang="en-US" smtClean="0"/>
-              <a:t>6/12/26</a:t>
+              <a:t>6/24/26</a:t>
             </a:fld>
             <a:endParaRPr lang="en-US"/>
           </a:p>
@@ -2259,7 +2259,7 @@
           <a:p>
             <a:fld id="{5BCAD085-E8A6-8845-BD4E-CB4CCA059FC4}" type="datetimeFigureOut">
               <a:rPr lang="en-US" smtClean="0"/>
-              <a:t>6/12/26</a:t>
+              <a:t>6/24/26</a:t>
             </a:fld>
             <a:endParaRPr lang="en-US"/>
           </a:p>
@@ -2511,7 +2511,7 @@
           <a:p>
             <a:fld id="{5BCAD085-E8A6-8845-BD4E-CB4CCA059FC4}" type="datetimeFigureOut">
               <a:rPr lang="en-US" smtClean="0"/>
-              <a:t>6/12/26</a:t>
+              <a:t>6/24/26</a:t>
             </a:fld>
             <a:endParaRPr lang="en-US"/>
           </a:p>
@@ -2722,7 +2722,7 @@
           <a:p>
             <a:fld id="{5BCAD085-E8A6-8845-BD4E-CB4CCA059FC4}" type="datetimeFigureOut">
               <a:rPr lang="en-US" smtClean="0"/>
-              <a:t>6/12/26</a:t>
+              <a:t>6/24/26</a:t>
             </a:fld>
             <a:endParaRPr lang="en-US"/>
           </a:p>
@@ -4651,7 +4651,7 @@
         <p:spPr>
           <a:xfrm>
             <a:off x="6629400" y="2926080"/>
-            <a:ext cx="4937760" cy="2560320"/>
+            <a:ext cx="4937760" cy="1227580"/>
           </a:xfrm>
           <a:prstGeom prst="rect">
             <a:avLst/>
@@ -4673,7 +4673,7 @@
               </a:spcAft>
             </a:pPr>
             <a:r>
-              <a:rPr sz="1300" b="1">
+              <a:rPr sz="1300" b="1" dirty="0">
                 <a:solidFill>
                   <a:srgbClr val="2E86C1"/>
                 </a:solidFill>
@@ -4682,7 +4682,7 @@
               <a:t>▸  </a:t>
             </a:r>
             <a:r>
-              <a:rPr sz="1300">
+              <a:rPr sz="1300" dirty="0">
                 <a:solidFill>
                   <a:srgbClr val="333333"/>
                 </a:solidFill>
@@ -4701,7 +4701,7 @@
               </a:spcAft>
             </a:pPr>
             <a:r>
-              <a:rPr sz="1300" b="1">
+              <a:rPr sz="1300" b="1" dirty="0">
                 <a:solidFill>
                   <a:srgbClr val="2E86C1"/>
                 </a:solidFill>
@@ -4710,7 +4710,7 @@
               <a:t>▸  </a:t>
             </a:r>
             <a:r>
-              <a:rPr sz="1300">
+              <a:rPr sz="1300" dirty="0">
                 <a:solidFill>
                   <a:srgbClr val="333333"/>
                 </a:solidFill>
@@ -4729,7 +4729,7 @@
               </a:spcAft>
             </a:pPr>
             <a:r>
-              <a:rPr sz="1300" b="1">
+              <a:rPr sz="1300" b="1" dirty="0">
                 <a:solidFill>
                   <a:srgbClr val="2E86C1"/>
                 </a:solidFill>
@@ -4738,7 +4738,7 @@
               <a:t>▸  </a:t>
             </a:r>
             <a:r>
-              <a:rPr sz="1300">
+              <a:rPr sz="1300" dirty="0">
                 <a:solidFill>
                   <a:srgbClr val="333333"/>
                 </a:solidFill>
@@ -4756,24 +4756,12 @@
                 <a:spcPts val="500"/>
               </a:spcAft>
             </a:pPr>
-            <a:r>
-              <a:rPr sz="1300" b="1">
-                <a:solidFill>
-                  <a:srgbClr val="2E86C1"/>
-                </a:solidFill>
-                <a:latin typeface="Calibri"/>
-              </a:rPr>
-              <a:t>▸  </a:t>
-            </a:r>
-            <a:r>
-              <a:rPr sz="1300">
-                <a:solidFill>
-                  <a:srgbClr val="333333"/>
-                </a:solidFill>
-                <a:latin typeface="Calibri"/>
-              </a:rPr>
-              <a:t>Shareable access across the team</a:t>
-            </a:r>
+            <a:endParaRPr sz="1300" dirty="0">
+              <a:solidFill>
+                <a:srgbClr val="333333"/>
+              </a:solidFill>
+              <a:latin typeface="Calibri"/>
+            </a:endParaRPr>
           </a:p>
         </p:txBody>
       </p:sp>
@@ -5880,7 +5868,7 @@
           <a:p>
             <a:pPr algn="l"/>
             <a:r>
-              <a:rPr sz="1400" b="1">
+              <a:rPr sz="1400" b="1" dirty="0">
                 <a:solidFill>
                   <a:srgbClr val="FFFFFF"/>
                 </a:solidFill>
@@ -7321,7 +7309,7 @@
         <p:spPr>
           <a:xfrm>
             <a:off x="7223760" y="4005072"/>
-            <a:ext cx="4297680" cy="457200"/>
+            <a:ext cx="4297680" cy="283154"/>
           </a:xfrm>
           <a:prstGeom prst="rect">
             <a:avLst/>
@@ -7336,13 +7324,31 @@
           <a:p>
             <a:pPr algn="l"/>
             <a:r>
-              <a:rPr sz="1600" b="1">
+              <a:rPr sz="1600" b="1" dirty="0">
                 <a:solidFill>
                   <a:srgbClr val="1E3A5F"/>
                 </a:solidFill>
                 <a:latin typeface="Calibri"/>
               </a:rPr>
-              <a:t>Full Audit Trail</a:t>
+              <a:t>Full </a:t>
+            </a:r>
+            <a:r>
+              <a:rPr lang="en-US" sz="1600" b="1" dirty="0">
+                <a:solidFill>
+                  <a:srgbClr val="1E3A5F"/>
+                </a:solidFill>
+                <a:latin typeface="Calibri"/>
+              </a:rPr>
+              <a:t>Log</a:t>
+            </a:r>
+            <a:r>
+              <a:rPr sz="1600" b="1" dirty="0">
+                <a:solidFill>
+                  <a:srgbClr val="1E3A5F"/>
+                </a:solidFill>
+                <a:latin typeface="Calibri"/>
+              </a:rPr>
+              <a:t> Trail</a:t>
             </a:r>
           </a:p>
         </p:txBody>
